--- a/Schools_ML_Track/camp_2026/slides/ML/ML17.pptx
+++ b/Schools_ML_Track/camp_2026/slides/ML/ML17.pptx
@@ -128,7 +128,7 @@
   <p:extLst>
     <p:ext uri="{521415D9-36F7-43E2-AB2F-B90AF26B5E84}">
       <p14:sectionLst xmlns:p14="http://schemas.microsoft.com/office/powerpoint/2010/main">
-        <p14:section name="Opening" id="{e2e765be-659b-56e0-f6a9-8c22ce383f90}">
+        <p14:section name="Opening" id="{6a2e342b-f039-e1bb-59c1-b40bbc25f3ec}">
           <p14:sldIdLst>
             <p14:sldId id="256"/>
             <p14:sldId id="257"/>
@@ -139,7 +139,7 @@
             <p14:sldId id="262"/>
           </p14:sldIdLst>
         </p14:section>
-        <p14:section name="Block A" id="{79820719-1834-adea-dc9e-226861f18e70}">
+        <p14:section name="Block A" id="{e43cdda6-8f12-3f59-b30d-ad46210d723d}">
           <p14:sldIdLst>
             <p14:sldId id="263"/>
             <p14:sldId id="264"/>
@@ -149,15 +149,15 @@
             <p14:sldId id="269"/>
           </p14:sldIdLst>
         </p14:section>
-        <p14:section name="Break" id="{341f4a89-ca57-b4ad-3bce-a3558f576fd3}">
+        <p14:section name="Break" id="{bd4af542-baeb-4659-21ed-cbd52a40b10c}">
           <p14:sldIdLst>
             <p14:sldId id="267"/>
           </p14:sldIdLst>
         </p14:section>
-        <p14:section name="Block A" id="{814e3170-4c78-67da-3baa-80c93842c1fd}">
+        <p14:section name="Block A" id="{127c5ec8-d228-9daa-1329-7e41e1e9aca3}">
           <p14:sldIdLst/>
         </p14:section>
-        <p14:section name="Block B" id="{d0e63c17-5aab-fb5a-de18-5a5834d645b9}">
+        <p14:section name="Block B" id="{ff2024b1-7ba4-dbcf-e3ea-04a9f7ffd7c7}">
           <p14:sldIdLst>
             <p14:sldId id="270"/>
             <p14:sldId id="271"/>
@@ -166,7 +166,7 @@
             <p14:sldId id="274"/>
           </p14:sldIdLst>
         </p14:section>
-        <p14:section name="Make and close" id="{7cf2c78c-3382-aab7-f751-be2b22871a21}">
+        <p14:section name="Make and close" id="{777af43f-d54e-b3e9-e38b-2df6ae10617d}">
           <p14:sldIdLst>
             <p14:sldId id="275"/>
             <p14:sldId id="276"/>

--- a/Schools_ML_Track/camp_2026/slides/ML/ML17.pptx
+++ b/Schools_ML_Track/camp_2026/slides/ML/ML17.pptx
@@ -128,7 +128,7 @@
   <p:extLst>
     <p:ext uri="{521415D9-36F7-43E2-AB2F-B90AF26B5E84}">
       <p14:sectionLst xmlns:p14="http://schemas.microsoft.com/office/powerpoint/2010/main">
-        <p14:section name="Opening" id="{6a2e342b-f039-e1bb-59c1-b40bbc25f3ec}">
+        <p14:section name="Opening" id="{05f68209-75f3-02f0-6e29-26f6124faa1d}">
           <p14:sldIdLst>
             <p14:sldId id="256"/>
             <p14:sldId id="257"/>
@@ -139,7 +139,7 @@
             <p14:sldId id="262"/>
           </p14:sldIdLst>
         </p14:section>
-        <p14:section name="Block A" id="{e43cdda6-8f12-3f59-b30d-ad46210d723d}">
+        <p14:section name="Block A" id="{e5f0d41d-0780-d9d1-e5c9-1c036e592dc7}">
           <p14:sldIdLst>
             <p14:sldId id="263"/>
             <p14:sldId id="264"/>
@@ -149,15 +149,15 @@
             <p14:sldId id="269"/>
           </p14:sldIdLst>
         </p14:section>
-        <p14:section name="Break" id="{bd4af542-baeb-4659-21ed-cbd52a40b10c}">
+        <p14:section name="Break" id="{c9470254-55c4-e84e-b4dd-a8fcdf3f2169}">
           <p14:sldIdLst>
             <p14:sldId id="267"/>
           </p14:sldIdLst>
         </p14:section>
-        <p14:section name="Block A" id="{127c5ec8-d228-9daa-1329-7e41e1e9aca3}">
+        <p14:section name="Block A" id="{21cc3967-545a-d59d-0c54-d1d7bbf041a8}">
           <p14:sldIdLst/>
         </p14:section>
-        <p14:section name="Block B" id="{ff2024b1-7ba4-dbcf-e3ea-04a9f7ffd7c7}">
+        <p14:section name="Block B" id="{0a576b0a-c6e0-35ac-e2a5-be426499ba41}">
           <p14:sldIdLst>
             <p14:sldId id="270"/>
             <p14:sldId id="271"/>
@@ -166,7 +166,7 @@
             <p14:sldId id="274"/>
           </p14:sldIdLst>
         </p14:section>
-        <p14:section name="Make and close" id="{777af43f-d54e-b3e9-e38b-2df6ae10617d}">
+        <p14:section name="Make and close" id="{400c73a8-727d-7c13-2a0c-524a717b7fec}">
           <p14:sldIdLst>
             <p14:sldId id="275"/>
             <p14:sldId id="276"/>
@@ -3197,7 +3197,24 @@
                 <a:ea typeface="Lato" pitchFamily="34" charset="-122"/>
                 <a:cs typeface="Lato" pitchFamily="34" charset="-120"/>
               </a:rPr>
-              <a:t>Mistakes, overfitting and fair comparisons</a:t>
+              <a:t>Mistakes, overfitting</a:t>
+            </a:r>
+            <a:endParaRPr lang="en-US" sz="5600" dirty="0"/>
+          </a:p>
+          <a:p>
+            <a:pPr algn="l" indent="0" marL="0">
+              <a:buNone/>
+            </a:pPr>
+            <a:r>
+              <a:rPr lang="en-US" sz="5600" b="1" dirty="0">
+                <a:solidFill>
+                  <a:srgbClr val="FFFFFF"/>
+                </a:solidFill>
+                <a:latin typeface="Lato" pitchFamily="34" charset="0"/>
+                <a:ea typeface="Lato" pitchFamily="34" charset="-122"/>
+                <a:cs typeface="Lato" pitchFamily="34" charset="-120"/>
+              </a:rPr>
+              <a:t>and fair comparisons</a:t>
             </a:r>
             <a:endParaRPr lang="en-US" sz="5600" dirty="0"/>
           </a:p>
@@ -5605,15 +5622,15 @@
           <a:p>
             <a:pPr algn="l" indent="0" marL="0">
               <a:lnSpc>
-                <a:spcPts val="3480"/>
+                <a:spcPts val="3240"/>
               </a:lnSpc>
               <a:spcAft>
-                <a:spcPts val="2520"/>
+                <a:spcPts val="2020"/>
               </a:spcAft>
               <a:buNone/>
             </a:pPr>
             <a:r>
-              <a:rPr lang="en-US" sz="2900" dirty="0">
+              <a:rPr lang="en-US" sz="2700" dirty="0">
                 <a:solidFill>
                   <a:srgbClr val="111111"/>
                 </a:solidFill>
@@ -5621,22 +5638,22 @@
                 <a:ea typeface="Lato" pitchFamily="34" charset="-122"/>
                 <a:cs typeface="Lato" pitchFamily="34" charset="-120"/>
               </a:rPr>
-              <a:t>Draw the 2 by 2 matrix for the toy answers and label both axes. Count the right and the wrong predictions. Explain why trying many settings against the final test answers weakens that test.</a:t>
-            </a:r>
-            <a:endParaRPr lang="en-US" sz="2900" dirty="0"/>
+              <a:t>Draw the 2 by 2 matrix for the toy answers and label both axes.</a:t>
+            </a:r>
+            <a:endParaRPr lang="en-US" sz="2700" dirty="0"/>
           </a:p>
           <a:p>
             <a:pPr algn="l" indent="0" marL="0">
               <a:lnSpc>
-                <a:spcPts val="3480"/>
+                <a:spcPts val="3240"/>
               </a:lnSpc>
               <a:spcAft>
-                <a:spcPts val="2520"/>
+                <a:spcPts val="2020"/>
               </a:spcAft>
               <a:buNone/>
             </a:pPr>
             <a:r>
-              <a:rPr lang="en-US" sz="2900" dirty="0">
+              <a:rPr lang="en-US" sz="2700" dirty="0">
                 <a:solidFill>
                   <a:srgbClr val="111111"/>
                 </a:solidFill>
@@ -5644,9 +5661,55 @@
                 <a:ea typeface="Lato" pitchFamily="34" charset="-122"/>
                 <a:cs typeface="Lato" pitchFamily="34" charset="-120"/>
               </a:rPr>
+              <a:t>Count the right and the wrong predictions.</a:t>
+            </a:r>
+            <a:endParaRPr lang="en-US" sz="2700" dirty="0"/>
+          </a:p>
+          <a:p>
+            <a:pPr algn="l" indent="0" marL="0">
+              <a:lnSpc>
+                <a:spcPts val="3240"/>
+              </a:lnSpc>
+              <a:spcAft>
+                <a:spcPts val="2020"/>
+              </a:spcAft>
+              <a:buNone/>
+            </a:pPr>
+            <a:r>
+              <a:rPr lang="en-US" sz="2700" dirty="0">
+                <a:solidFill>
+                  <a:srgbClr val="111111"/>
+                </a:solidFill>
+                <a:latin typeface="Lato" pitchFamily="34" charset="0"/>
+                <a:ea typeface="Lato" pitchFamily="34" charset="-122"/>
+                <a:cs typeface="Lato" pitchFamily="34" charset="-120"/>
+              </a:rPr>
+              <a:t>Explain why trying many settings against the final test answers weakens that test.</a:t>
+            </a:r>
+            <a:endParaRPr lang="en-US" sz="2700" dirty="0"/>
+          </a:p>
+          <a:p>
+            <a:pPr algn="l" indent="0" marL="0">
+              <a:lnSpc>
+                <a:spcPts val="3240"/>
+              </a:lnSpc>
+              <a:spcAft>
+                <a:spcPts val="2020"/>
+              </a:spcAft>
+              <a:buNone/>
+            </a:pPr>
+            <a:r>
+              <a:rPr lang="en-US" sz="2700" dirty="0">
+                <a:solidFill>
+                  <a:srgbClr val="111111"/>
+                </a:solidFill>
+                <a:latin typeface="Lato" pitchFamily="34" charset="0"/>
+                <a:ea typeface="Lato" pitchFamily="34" charset="-122"/>
+                <a:cs typeface="Lato" pitchFamily="34" charset="-120"/>
+              </a:rPr>
               <a:t>Save it as ML17. Write two sentences: what you changed and how you checked it.</a:t>
             </a:r>
-            <a:endParaRPr lang="en-US" sz="2900" dirty="0"/>
+            <a:endParaRPr lang="en-US" sz="2700" dirty="0"/>
           </a:p>
         </p:txBody>
       </p:sp>
@@ -7608,9 +7671,33 @@
           </a:ln>
         </p:spPr>
       </p:sp>
-      <p:sp>
-        <p:nvSpPr>
-          <p:cNvPr id="13" name="Text 9"/>
+      <p:pic>
+        <p:nvPicPr>
+          <p:cNvPr id="13" name="Image 2" descr="locked test">    </p:cNvPr>
+          <p:cNvPicPr>
+            <a:picLocks noChangeAspect="1"/>
+          </p:cNvPicPr>
+          <p:nvPr/>
+        </p:nvPicPr>
+        <p:blipFill>
+          <a:blip r:embed="rId3"/>
+          <a:stretch>
+            <a:fillRect/>
+          </a:stretch>
+        </p:blipFill>
+        <p:spPr>
+          <a:xfrm>
+            <a:off x="640080" y="4745736"/>
+            <a:ext cx="1188720" cy="1188720"/>
+          </a:xfrm>
+          <a:prstGeom prst="rect">
+            <a:avLst/>
+          </a:prstGeom>
+        </p:spPr>
+      </p:pic>
+      <p:sp>
+        <p:nvSpPr>
+          <p:cNvPr id="14" name="Text 9"/>
           <p:cNvSpPr txBox="1"/>
           <p:nvPr/>
         </p:nvSpPr>
@@ -7652,7 +7739,7 @@
       </p:sp>
       <p:sp>
         <p:nvSpPr>
-          <p:cNvPr id="14" name="Text 10"/>
+          <p:cNvPr id="15" name="Text 10"/>
           <p:cNvSpPr txBox="1"/>
           <p:nvPr/>
         </p:nvSpPr>
@@ -7694,7 +7781,7 @@
       </p:sp>
       <p:sp>
         <p:nvSpPr>
-          <p:cNvPr id="15" name="Text 11"/>
+          <p:cNvPr id="16" name="Text 11"/>
           <p:cNvSpPr txBox="1"/>
           <p:nvPr/>
         </p:nvSpPr>
@@ -8332,11 +8419,11 @@
         <p:spPr>
           <a:xfrm>
             <a:off x="640080" y="1645920"/>
-            <a:ext cx="10881360" cy="3383280"/>
+            <a:ext cx="10881360" cy="2816352"/>
           </a:xfrm>
           <a:prstGeom prst="roundRect">
             <a:avLst>
-              <a:gd name="adj" fmla="val 2162"/>
+              <a:gd name="adj" fmla="val 2597"/>
             </a:avLst>
           </a:prstGeom>
           <a:solidFill>
@@ -8354,7 +8441,7 @@
         <p:spPr>
           <a:xfrm>
             <a:off x="841248" y="1847088"/>
-            <a:ext cx="10479024" cy="2980944"/>
+            <a:ext cx="10479024" cy="2414016"/>
           </a:xfrm>
           <a:prstGeom prst="rect">
             <a:avLst/>
@@ -8603,11 +8690,8 @@
                 <a:ea typeface="Courier New" pitchFamily="34" charset="-122"/>
                 <a:cs typeface="Courier New" pitchFamily="34" charset="-120"/>
               </a:rPr>
-              <a:t>ConfusionMatrixDisplay(</a:t>
-            </a:r>
-            <a:endParaRPr lang="en-US" sz="1800" dirty="0"/>
-          </a:p>
-          <a:p>
+              <a:t>ConfusionMatrixDisplay(matrix, display_labels=[</a:t>
+            </a:r>
             <a:pPr algn="l" indent="0" marL="0">
               <a:lnSpc>
                 <a:spcPts val="2340"/>
@@ -8617,13 +8701,13 @@
             <a:r>
               <a:rPr lang="en-US" sz="1800" dirty="0">
                 <a:solidFill>
-                  <a:srgbClr val="FFFFFF"/>
+                  <a:srgbClr val="E0BE36"/>
                 </a:solidFill>
                 <a:latin typeface="Courier New" pitchFamily="34" charset="0"/>
                 <a:ea typeface="Courier New" pitchFamily="34" charset="-122"/>
                 <a:cs typeface="Courier New" pitchFamily="34" charset="-120"/>
               </a:rPr>
-              <a:t>    matrix, display_labels=[</a:t>
+              <a:t>"no"</a:t>
             </a:r>
             <a:pPr algn="l" indent="0" marL="0">
               <a:lnSpc>
@@ -8634,13 +8718,13 @@
             <a:r>
               <a:rPr lang="en-US" sz="1800" dirty="0">
                 <a:solidFill>
-                  <a:srgbClr val="E0BE36"/>
+                  <a:srgbClr val="FFFFFF"/>
                 </a:solidFill>
                 <a:latin typeface="Courier New" pitchFamily="34" charset="0"/>
                 <a:ea typeface="Courier New" pitchFamily="34" charset="-122"/>
                 <a:cs typeface="Courier New" pitchFamily="34" charset="-120"/>
               </a:rPr>
-              <a:t>"no"</a:t>
+              <a:t>, </a:t>
             </a:r>
             <a:pPr algn="l" indent="0" marL="0">
               <a:lnSpc>
@@ -8651,13 +8735,13 @@
             <a:r>
               <a:rPr lang="en-US" sz="1800" dirty="0">
                 <a:solidFill>
-                  <a:srgbClr val="FFFFFF"/>
+                  <a:srgbClr val="E0BE36"/>
                 </a:solidFill>
                 <a:latin typeface="Courier New" pitchFamily="34" charset="0"/>
                 <a:ea typeface="Courier New" pitchFamily="34" charset="-122"/>
                 <a:cs typeface="Courier New" pitchFamily="34" charset="-120"/>
               </a:rPr>
-              <a:t>, </a:t>
+              <a:t>"yes"</a:t>
             </a:r>
             <a:pPr algn="l" indent="0" marL="0">
               <a:lnSpc>
@@ -8668,14 +8752,17 @@
             <a:r>
               <a:rPr lang="en-US" sz="1800" dirty="0">
                 <a:solidFill>
-                  <a:srgbClr val="E0BE36"/>
+                  <a:srgbClr val="FFFFFF"/>
                 </a:solidFill>
                 <a:latin typeface="Courier New" pitchFamily="34" charset="0"/>
                 <a:ea typeface="Courier New" pitchFamily="34" charset="-122"/>
                 <a:cs typeface="Courier New" pitchFamily="34" charset="-120"/>
               </a:rPr>
-              <a:t>"yes"</a:t>
-            </a:r>
+              <a:t>]).plot()</a:t>
+            </a:r>
+            <a:endParaRPr lang="en-US" sz="1800" dirty="0"/>
+          </a:p>
+          <a:p>
             <a:pPr algn="l" indent="0" marL="0">
               <a:lnSpc>
                 <a:spcPts val="2340"/>
@@ -8691,46 +8778,6 @@
                 <a:ea typeface="Courier New" pitchFamily="34" charset="-122"/>
                 <a:cs typeface="Courier New" pitchFamily="34" charset="-120"/>
               </a:rPr>
-              <a:t>]</a:t>
-            </a:r>
-            <a:endParaRPr lang="en-US" sz="1800" dirty="0"/>
-          </a:p>
-          <a:p>
-            <a:pPr algn="l" indent="0" marL="0">
-              <a:lnSpc>
-                <a:spcPts val="2340"/>
-              </a:lnSpc>
-              <a:buNone/>
-            </a:pPr>
-            <a:r>
-              <a:rPr lang="en-US" sz="1800" dirty="0">
-                <a:solidFill>
-                  <a:srgbClr val="FFFFFF"/>
-                </a:solidFill>
-                <a:latin typeface="Courier New" pitchFamily="34" charset="0"/>
-                <a:ea typeface="Courier New" pitchFamily="34" charset="-122"/>
-                <a:cs typeface="Courier New" pitchFamily="34" charset="-120"/>
-              </a:rPr>
-              <a:t>).plot()</a:t>
-            </a:r>
-            <a:endParaRPr lang="en-US" sz="1800" dirty="0"/>
-          </a:p>
-          <a:p>
-            <a:pPr algn="l" indent="0" marL="0">
-              <a:lnSpc>
-                <a:spcPts val="2340"/>
-              </a:lnSpc>
-              <a:buNone/>
-            </a:pPr>
-            <a:r>
-              <a:rPr lang="en-US" sz="1800" dirty="0">
-                <a:solidFill>
-                  <a:srgbClr val="FFFFFF"/>
-                </a:solidFill>
-                <a:latin typeface="Courier New" pitchFamily="34" charset="0"/>
-                <a:ea typeface="Courier New" pitchFamily="34" charset="-122"/>
-                <a:cs typeface="Courier New" pitchFamily="34" charset="-120"/>
-              </a:rPr>
               <a:t>plt.show()</a:t>
             </a:r>
             <a:endParaRPr lang="en-US" sz="1800" dirty="0"/>
@@ -8745,8 +8792,8 @@
         </p:nvSpPr>
         <p:spPr>
           <a:xfrm>
-            <a:off x="640080" y="5212080"/>
-            <a:ext cx="8046720" cy="1051560"/>
+            <a:off x="640080" y="4645152"/>
+            <a:ext cx="8046720" cy="1618488"/>
           </a:xfrm>
           <a:prstGeom prst="rect">
             <a:avLst/>
@@ -8760,7 +8807,7 @@
           <a:p>
             <a:pPr algn="l" indent="0" marL="0">
               <a:lnSpc>
-                <a:spcPts val="2280"/>
+                <a:spcPts val="3120"/>
               </a:lnSpc>
               <a:spcAft>
                 <a:spcPts val="1010"/>
@@ -8768,7 +8815,7 @@
               <a:buNone/>
             </a:pPr>
             <a:r>
-              <a:rPr lang="en-US" sz="1900" dirty="0">
+              <a:rPr lang="en-US" sz="2600" dirty="0">
                 <a:solidFill>
                   <a:srgbClr val="111111"/>
                 </a:solidFill>
@@ -8778,12 +8825,12 @@
               </a:rPr>
               <a:t>The matrix will have two rows and two columns. Predict which cells hold the correct answers.</a:t>
             </a:r>
-            <a:endParaRPr lang="en-US" sz="1900" dirty="0"/>
+            <a:endParaRPr lang="en-US" sz="2600" dirty="0"/>
           </a:p>
           <a:p>
             <a:pPr algn="l" indent="0" marL="0">
               <a:lnSpc>
-                <a:spcPts val="2280"/>
+                <a:spcPts val="3120"/>
               </a:lnSpc>
               <a:spcAft>
                 <a:spcPts val="1010"/>
@@ -8791,7 +8838,7 @@
               <a:buNone/>
             </a:pPr>
             <a:r>
-              <a:rPr lang="en-US" sz="1900" dirty="0">
+              <a:rPr lang="en-US" sz="2600" dirty="0">
                 <a:solidFill>
                   <a:srgbClr val="111111"/>
                 </a:solidFill>
@@ -8801,7 +8848,7 @@
               </a:rPr>
               <a:t>Write your guess on paper before we run it.</a:t>
             </a:r>
-            <a:endParaRPr lang="en-US" sz="1900" dirty="0"/>
+            <a:endParaRPr lang="en-US" sz="2600" dirty="0"/>
           </a:p>
         </p:txBody>
       </p:sp>
@@ -8821,7 +8868,7 @@
         </p:blipFill>
         <p:spPr>
           <a:xfrm>
-            <a:off x="10241280" y="5214366"/>
+            <a:off x="10241280" y="5031486"/>
             <a:ext cx="1188720" cy="1046988"/>
           </a:xfrm>
           <a:prstGeom prst="rect">
